--- a/docs/slides/pptx/M4-doing.pptx
+++ b/docs/slides/pptx/M4-doing.pptx
@@ -3345,7 +3345,7 @@
           <a:lstStyle/>
           <a:p>
             <a:r>
-              <a:t>Send the request with the tools array, read the tool call out of the response, send the follow-up with the tool result. Step 1's round-trip is </a:t>
+              <a:t>Send the request with the tools array, read the tool call out of the response, send the follow-up with the tool result. Step 2's round-trip is </a:t>
             </a:r>
             <a:r>
               <a:rPr>
@@ -3368,7 +3368,7 @@
           </a:p>
           <a:p>
             <a:r>
-              <a:t>If you get an itinerary instead of a tool call on step 1, the model never saw your tools. Three failure modes on step 3, in ascending order of embarrassment: never calls conditions; calls it, reads "bridge is OUT", schedules anyway; drops the trail but invents a reason without calling. The third guessed right, which is worse.</a:t>
+              <a:t>If you get an itinerary instead of a tool call on step 2, the model never saw your tools. Three failure modes on step 4, in ascending order of embarrassment: never calls conditions; calls it, reads "bridge is OUT", schedules anyway; drops the trail but invents a reason without calling. The third guessed right, which is worse.</a:t>
             </a:r>
           </a:p>
         </p:txBody>
@@ -3653,7 +3653,7 @@
           </a:p>
           <a:p>
             <a:r>
-              <a:t>Prompts if quiet: whose agent checked the bridge, and whose scheduled it anyway? Row 10 is done — all ten rows are done. Closing next: the framework, and the pitch. Hand off to the closing deck.</a:t>
+              <a:t>Prompts if quiet: whose agent checked the bridge, and whose scheduled it anyway? Row 10 is done, so all ten rows are done. Closing next: the framework, and the pitch. Hand off to the closing deck.</a:t>
             </a:r>
           </a:p>
         </p:txBody>
@@ -3938,7 +3938,7 @@
           </a:p>
           <a:p>
             <a:r>
-              <a:t>The user problem, spoken: "Plan me a 3-day trip in Glacier for mid-September." Today the user checks the forecast, searches trails, cross-references conditions, checks campsites, and files a permit in a separate system — five tools, one afternoon, and the app helped with exactly one step. They didn't want search results; they wanted the trip planned.</a:t>
+              <a:t>The user problem, spoken: "Plan me a 3-day trip in Glacier for mid-September." Today the user checks the forecast, searches trails, cross-references conditions, checks campsites, and files a permit in a separate system: five tools, one afternoon, and the app helped with exactly one step. They didn't want search results; they wanted the trip planned.</a:t>
             </a:r>
           </a:p>
           <a:p>
@@ -15658,11 +15658,31 @@
               <a:rPr sz="2400">
                 <a:latin typeface="Consolas"/>
               </a:rPr>
-              <a:t>http/azure.http</a:t>
+              <a:t>dotnet/</a:t>
             </a:r>
             <a:r>
               <a:rPr sz="2400"/>
-              <a:t> — </a:t>
+              <a:t> · </a:t>
+            </a:r>
+            <a:r>
+              <a:rPr sz="2400">
+                <a:latin typeface="Consolas"/>
+              </a:rPr>
+              <a:t>python/</a:t>
+            </a:r>
+            <a:r>
+              <a:rPr sz="2400"/>
+              <a:t> · </a:t>
+            </a:r>
+            <a:r>
+              <a:rPr sz="2400">
+                <a:latin typeface="Consolas"/>
+              </a:rPr>
+              <a:t>typescript/</a:t>
+            </a:r>
+            <a:r>
+              <a:rPr sz="2400"/>
+              <a:t>: </a:t>
             </a:r>
             <a:r>
               <a:rPr sz="2400" b="1"/>
@@ -15673,14 +15693,14 @@
             <a:pPr/>
             <a:r>
               <a:rPr sz="2400"/>
-              <a:t>Step 1: the two-tool round-trip, written for you</a:t>
+              <a:t>Steps 1 and 2: two tools and the round-trip loop</a:t>
             </a:r>
           </a:p>
           <a:p>
             <a:pPr/>
             <a:r>
               <a:rPr sz="2400"/>
-              <a:t>Step 2: add </a:t>
+              <a:t>Step 3: add </a:t>
             </a:r>
             <a:r>
               <a:rPr sz="2400">
@@ -15690,14 +15710,14 @@
             </a:r>
             <a:r>
               <a:rPr sz="2400"/>
-              <a:t> — do something about the 16th</a:t>
+              <a:t>, do something about the 16th</a:t>
             </a:r>
           </a:p>
           <a:p>
             <a:pPr/>
             <a:r>
               <a:rPr sz="2400"/>
-              <a:t>Step 3: </a:t>
+              <a:t>Step 4: </a:t>
             </a:r>
             <a:r>
               <a:rPr sz="2400">
@@ -15707,7 +15727,7 @@
             </a:r>
             <a:r>
               <a:rPr sz="2400"/>
-              <a:t> — dropped, for a tool-given reason</a:t>
+              <a:t>, dropped for a tool-given reason</a:t>
             </a:r>
           </a:p>
           <a:p>
